--- a/Aviation Accident Analysis and Recommendations.pptx
+++ b/Aviation Accident Analysis and Recommendations.pptx
@@ -457,7 +457,7 @@
           <a:p>
             <a:fld id="{523AC3A0-B9F1-465F-8E33-A929E4C891CD}" type="datetimeFigureOut">
               <a:rPr lang="en-GB" smtClean="0"/>
-              <a:t>29/04/2025</a:t>
+              <a:t>01/05/2025</a:t>
             </a:fld>
             <a:endParaRPr lang="en-GB"/>
           </a:p>
@@ -1545,7 +1545,7 @@
           <a:p>
             <a:fld id="{523AC3A0-B9F1-465F-8E33-A929E4C891CD}" type="datetimeFigureOut">
               <a:rPr lang="en-GB" smtClean="0"/>
-              <a:t>29/04/2025</a:t>
+              <a:t>01/05/2025</a:t>
             </a:fld>
             <a:endParaRPr lang="en-GB"/>
           </a:p>
@@ -2525,7 +2525,7 @@
           <a:p>
             <a:fld id="{523AC3A0-B9F1-465F-8E33-A929E4C891CD}" type="datetimeFigureOut">
               <a:rPr lang="en-GB" smtClean="0"/>
-              <a:t>29/04/2025</a:t>
+              <a:t>01/05/2025</a:t>
             </a:fld>
             <a:endParaRPr lang="en-GB"/>
           </a:p>
@@ -3659,7 +3659,7 @@
           <a:p>
             <a:fld id="{523AC3A0-B9F1-465F-8E33-A929E4C891CD}" type="datetimeFigureOut">
               <a:rPr lang="en-GB" smtClean="0"/>
-              <a:t>29/04/2025</a:t>
+              <a:t>01/05/2025</a:t>
             </a:fld>
             <a:endParaRPr lang="en-GB"/>
           </a:p>
@@ -4692,7 +4692,7 @@
           <a:p>
             <a:fld id="{523AC3A0-B9F1-465F-8E33-A929E4C891CD}" type="datetimeFigureOut">
               <a:rPr lang="en-GB" smtClean="0"/>
-              <a:t>29/04/2025</a:t>
+              <a:t>01/05/2025</a:t>
             </a:fld>
             <a:endParaRPr lang="en-GB"/>
           </a:p>
@@ -5352,7 +5352,7 @@
           <a:p>
             <a:fld id="{523AC3A0-B9F1-465F-8E33-A929E4C891CD}" type="datetimeFigureOut">
               <a:rPr lang="en-GB" smtClean="0"/>
-              <a:t>29/04/2025</a:t>
+              <a:t>01/05/2025</a:t>
             </a:fld>
             <a:endParaRPr lang="en-GB"/>
           </a:p>
@@ -6213,7 +6213,7 @@
           <a:p>
             <a:fld id="{523AC3A0-B9F1-465F-8E33-A929E4C891CD}" type="datetimeFigureOut">
               <a:rPr lang="en-GB" smtClean="0"/>
-              <a:t>29/04/2025</a:t>
+              <a:t>01/05/2025</a:t>
             </a:fld>
             <a:endParaRPr lang="en-GB"/>
           </a:p>
@@ -6403,7 +6403,7 @@
           <a:p>
             <a:fld id="{523AC3A0-B9F1-465F-8E33-A929E4C891CD}" type="datetimeFigureOut">
               <a:rPr lang="en-GB" smtClean="0"/>
-              <a:t>29/04/2025</a:t>
+              <a:t>01/05/2025</a:t>
             </a:fld>
             <a:endParaRPr lang="en-GB"/>
           </a:p>
@@ -7375,7 +7375,7 @@
           <a:p>
             <a:fld id="{523AC3A0-B9F1-465F-8E33-A929E4C891CD}" type="datetimeFigureOut">
               <a:rPr lang="en-GB" smtClean="0"/>
-              <a:t>29/04/2025</a:t>
+              <a:t>01/05/2025</a:t>
             </a:fld>
             <a:endParaRPr lang="en-GB"/>
           </a:p>
@@ -7586,7 +7586,7 @@
           <a:p>
             <a:fld id="{523AC3A0-B9F1-465F-8E33-A929E4C891CD}" type="datetimeFigureOut">
               <a:rPr lang="en-GB" smtClean="0"/>
-              <a:t>29/04/2025</a:t>
+              <a:t>01/05/2025</a:t>
             </a:fld>
             <a:endParaRPr lang="en-GB"/>
           </a:p>
@@ -8620,7 +8620,7 @@
           <a:p>
             <a:fld id="{523AC3A0-B9F1-465F-8E33-A929E4C891CD}" type="datetimeFigureOut">
               <a:rPr lang="en-GB" smtClean="0"/>
-              <a:t>29/04/2025</a:t>
+              <a:t>01/05/2025</a:t>
             </a:fld>
             <a:endParaRPr lang="en-GB"/>
           </a:p>
@@ -8892,7 +8892,7 @@
           <a:p>
             <a:fld id="{523AC3A0-B9F1-465F-8E33-A929E4C891CD}" type="datetimeFigureOut">
               <a:rPr lang="en-GB" smtClean="0"/>
-              <a:t>29/04/2025</a:t>
+              <a:t>01/05/2025</a:t>
             </a:fld>
             <a:endParaRPr lang="en-GB"/>
           </a:p>
@@ -9302,7 +9302,7 @@
           <a:p>
             <a:fld id="{523AC3A0-B9F1-465F-8E33-A929E4C891CD}" type="datetimeFigureOut">
               <a:rPr lang="en-GB" smtClean="0"/>
-              <a:t>29/04/2025</a:t>
+              <a:t>01/05/2025</a:t>
             </a:fld>
             <a:endParaRPr lang="en-GB"/>
           </a:p>
@@ -9429,7 +9429,7 @@
           <a:p>
             <a:fld id="{523AC3A0-B9F1-465F-8E33-A929E4C891CD}" type="datetimeFigureOut">
               <a:rPr lang="en-GB" smtClean="0"/>
-              <a:t>29/04/2025</a:t>
+              <a:t>01/05/2025</a:t>
             </a:fld>
             <a:endParaRPr lang="en-GB"/>
           </a:p>
@@ -9524,7 +9524,7 @@
           <a:p>
             <a:fld id="{523AC3A0-B9F1-465F-8E33-A929E4C891CD}" type="datetimeFigureOut">
               <a:rPr lang="en-GB" smtClean="0"/>
-              <a:t>29/04/2025</a:t>
+              <a:t>01/05/2025</a:t>
             </a:fld>
             <a:endParaRPr lang="en-GB"/>
           </a:p>
@@ -10605,7 +10605,7 @@
           <a:p>
             <a:fld id="{523AC3A0-B9F1-465F-8E33-A929E4C891CD}" type="datetimeFigureOut">
               <a:rPr lang="en-GB" smtClean="0"/>
-              <a:t>29/04/2025</a:t>
+              <a:t>01/05/2025</a:t>
             </a:fld>
             <a:endParaRPr lang="en-GB"/>
           </a:p>
@@ -11713,7 +11713,7 @@
           <a:p>
             <a:fld id="{523AC3A0-B9F1-465F-8E33-A929E4C891CD}" type="datetimeFigureOut">
               <a:rPr lang="en-GB" smtClean="0"/>
-              <a:t>29/04/2025</a:t>
+              <a:t>01/05/2025</a:t>
             </a:fld>
             <a:endParaRPr lang="en-GB"/>
           </a:p>
@@ -12710,7 +12710,7 @@
           <a:p>
             <a:fld id="{523AC3A0-B9F1-465F-8E33-A929E4C891CD}" type="datetimeFigureOut">
               <a:rPr lang="en-GB" smtClean="0"/>
-              <a:t>29/04/2025</a:t>
+              <a:t>01/05/2025</a:t>
             </a:fld>
             <a:endParaRPr lang="en-GB"/>
           </a:p>
@@ -13318,7 +13318,15 @@
           <a:p>
             <a:r>
               <a:rPr lang="en-GB" sz="2000" dirty="0" smtClean="0"/>
-              <a:t>Help the company identify low risk aircraft that they can use to enter the aviation industry</a:t>
+              <a:t>Help the company identify low risk </a:t>
+            </a:r>
+            <a:r>
+              <a:rPr lang="en-GB" sz="2000" dirty="0" smtClean="0"/>
+              <a:t>aircraft MODELS that </a:t>
+            </a:r>
+            <a:r>
+              <a:rPr lang="en-GB" sz="2000" dirty="0" smtClean="0"/>
+              <a:t>they can use to enter the aviation industry</a:t>
             </a:r>
             <a:endParaRPr lang="en-GB" sz="2000" dirty="0"/>
           </a:p>
@@ -13401,7 +13409,23 @@
           <a:p>
             <a:r>
               <a:rPr lang="en-GB" dirty="0" smtClean="0"/>
-              <a:t>Avoid flight operations in IMC as most fatal accidents occurred under poor weather.</a:t>
+              <a:t>Avoid flight </a:t>
+            </a:r>
+            <a:r>
+              <a:rPr lang="en-GB" dirty="0" smtClean="0"/>
+              <a:t>operations under </a:t>
+            </a:r>
+            <a:r>
+              <a:rPr lang="en-GB" dirty="0" smtClean="0"/>
+              <a:t>IMC as most fatal accidents </a:t>
+            </a:r>
+            <a:r>
+              <a:rPr lang="en-GB" dirty="0" smtClean="0"/>
+              <a:t>occur during poor </a:t>
+            </a:r>
+            <a:r>
+              <a:rPr lang="en-GB" dirty="0" smtClean="0"/>
+              <a:t>weather.</a:t>
             </a:r>
             <a:endParaRPr lang="en-GB" dirty="0"/>
           </a:p>
@@ -13454,7 +13478,7 @@
           <a:p>
             <a:r>
               <a:rPr lang="en-GB" sz="2400" dirty="0" smtClean="0"/>
-              <a:t>Q&amp;A</a:t>
+              <a:t>Q&amp;A Session</a:t>
             </a:r>
             <a:endParaRPr lang="en-GB" sz="2400" dirty="0"/>
           </a:p>
@@ -13470,25 +13494,91 @@
             <p:ph type="body" sz="half" idx="2"/>
           </p:nvPr>
         </p:nvSpPr>
-        <p:spPr/>
+        <p:spPr>
+          <a:xfrm>
+            <a:off x="1154954" y="3543299"/>
+            <a:ext cx="8825659" cy="2822331"/>
+          </a:xfrm>
+        </p:spPr>
         <p:txBody>
-          <a:bodyPr/>
+          <a:bodyPr>
+            <a:normAutofit fontScale="92500" lnSpcReduction="20000"/>
+          </a:bodyPr>
           <a:lstStyle/>
           <a:p>
             <a:r>
               <a:rPr lang="en-GB" dirty="0" smtClean="0"/>
-              <a:t>Any Questions?</a:t>
+              <a:t>Are there any </a:t>
+            </a:r>
+            <a:r>
+              <a:rPr lang="en-GB" dirty="0"/>
+              <a:t>q</a:t>
+            </a:r>
+            <a:r>
+              <a:rPr lang="en-GB" dirty="0" smtClean="0"/>
+              <a:t>uestions?</a:t>
             </a:r>
             <a:endParaRPr lang="en-GB" dirty="0"/>
           </a:p>
           <a:p>
             <a:endParaRPr lang="en-GB" dirty="0" smtClean="0"/>
+          </a:p>
+          <a:p>
+            <a:r>
+              <a:rPr lang="en-GB" dirty="0" smtClean="0"/>
+              <a:t>Contact Information:</a:t>
+            </a:r>
+          </a:p>
+          <a:p>
+            <a:r>
+              <a:rPr lang="en-GB" dirty="0" smtClean="0"/>
+              <a:t>Name: Jenipher Oduor</a:t>
+            </a:r>
+          </a:p>
+          <a:p>
+            <a:r>
+              <a:rPr lang="en-GB" dirty="0" smtClean="0"/>
+              <a:t>Email: </a:t>
+            </a:r>
+            <a:r>
+              <a:rPr lang="en-GB" dirty="0" smtClean="0">
+                <a:hlinkClick r:id="rId2"/>
+              </a:rPr>
+              <a:t>jenipheroduor@gmail.com</a:t>
+            </a:r>
+            <a:endParaRPr lang="en-GB" dirty="0" smtClean="0"/>
+          </a:p>
+          <a:p>
+            <a:r>
+              <a:rPr lang="en-GB" dirty="0" smtClean="0"/>
+              <a:t>LinkedIn</a:t>
+            </a:r>
+            <a:r>
+              <a:rPr lang="en-GB" dirty="0"/>
+              <a:t>: </a:t>
+            </a:r>
+            <a:r>
+              <a:rPr lang="en-GB" dirty="0" smtClean="0">
+                <a:hlinkClick r:id="rId3"/>
+              </a:rPr>
+              <a:t>www.linkedin.com/in/jenipher-oduor</a:t>
+            </a:r>
+            <a:endParaRPr lang="en-GB" dirty="0" smtClean="0"/>
+          </a:p>
+          <a:p>
+            <a:endParaRPr lang="en-GB" dirty="0"/>
           </a:p>
           <a:p>
             <a:r>
               <a:rPr lang="en-GB" dirty="0" smtClean="0"/>
               <a:t>Thankyou.</a:t>
             </a:r>
+            <a:endParaRPr lang="en-GB" dirty="0"/>
+          </a:p>
+          <a:p>
+            <a:endParaRPr lang="en-GB" dirty="0" smtClean="0"/>
+          </a:p>
+          <a:p>
             <a:endParaRPr lang="en-GB" dirty="0"/>
           </a:p>
         </p:txBody>
@@ -13567,19 +13657,19 @@
           <a:p>
             <a:r>
               <a:rPr lang="en-GB" sz="2000" dirty="0" smtClean="0"/>
-              <a:t>Assist the company to identify which low risk aircraft </a:t>
+              <a:t>Assist the company to identify which low risk aircraft they can purchase as </a:t>
             </a:r>
             <a:r>
               <a:rPr lang="en-GB" sz="2000" dirty="0" smtClean="0"/>
-              <a:t>they can </a:t>
+              <a:t>they expand into </a:t>
             </a:r>
             <a:r>
               <a:rPr lang="en-GB" sz="2000" dirty="0" smtClean="0"/>
-              <a:t>purchase as they enter the aviation </a:t>
+              <a:t>the aviation </a:t>
             </a:r>
             <a:r>
               <a:rPr lang="en-GB" sz="2000" dirty="0" smtClean="0"/>
-              <a:t>industry</a:t>
+              <a:t>industry.</a:t>
             </a:r>
             <a:endParaRPr lang="en-GB" sz="2000" dirty="0"/>
           </a:p>
@@ -13653,7 +13743,7 @@
         <p:spPr/>
         <p:txBody>
           <a:bodyPr>
-            <a:normAutofit fontScale="92500" lnSpcReduction="20000"/>
+            <a:normAutofit/>
           </a:bodyPr>
           <a:lstStyle/>
           <a:p>
@@ -13671,8 +13761,13 @@
             </a:pPr>
             <a:r>
               <a:rPr lang="en-GB" sz="2000" dirty="0" smtClean="0"/>
-              <a:t>National Transportation Safety Board</a:t>
-            </a:r>
+              <a:t>National Transportation Safety </a:t>
+            </a:r>
+            <a:r>
+              <a:rPr lang="en-GB" sz="2000" dirty="0" smtClean="0"/>
+              <a:t>Board (NTSB)</a:t>
+            </a:r>
+            <a:endParaRPr lang="en-GB" sz="2000" dirty="0" smtClean="0"/>
           </a:p>
           <a:p>
             <a:pPr marL="0" indent="0">
@@ -13695,7 +13790,23 @@
             </a:pPr>
             <a:r>
               <a:rPr lang="en-GB" sz="2000" dirty="0" smtClean="0"/>
-              <a:t>The data includes aviation accidents and selected incidents from 1962 to 2023.</a:t>
+              <a:t>The </a:t>
+            </a:r>
+            <a:r>
+              <a:rPr lang="en-GB" sz="2000" dirty="0" smtClean="0"/>
+              <a:t>dataset </a:t>
+            </a:r>
+            <a:r>
+              <a:rPr lang="en-GB" sz="2000" dirty="0" smtClean="0"/>
+              <a:t>includes aviation accidents and selected incidents from 1962 to </a:t>
+            </a:r>
+            <a:r>
+              <a:rPr lang="en-GB" sz="2000" dirty="0" smtClean="0"/>
+              <a:t>2023, covering the </a:t>
+            </a:r>
+            <a:r>
+              <a:rPr lang="en-GB" sz="2000" dirty="0" smtClean="0"/>
+              <a:t>United States and International waters.</a:t>
             </a:r>
           </a:p>
           <a:p>
@@ -13704,7 +13815,23 @@
             </a:pPr>
             <a:r>
               <a:rPr lang="en-GB" sz="2000" dirty="0" smtClean="0"/>
-              <a:t>The data covers the United States and International waters.</a:t>
+              <a:t>Size:</a:t>
+            </a:r>
+            <a:r>
+              <a:rPr lang="en-GB" sz="2000" dirty="0" smtClean="0"/>
+              <a:t> </a:t>
+            </a:r>
+            <a:r>
+              <a:rPr lang="en-GB" sz="2000" dirty="0" smtClean="0"/>
+              <a:t>90,348 </a:t>
+            </a:r>
+            <a:r>
+              <a:rPr lang="en-GB" sz="2000" dirty="0" smtClean="0"/>
+              <a:t>entries, 31 </a:t>
+            </a:r>
+            <a:r>
+              <a:rPr lang="en-GB" sz="2000" dirty="0" smtClean="0"/>
+              <a:t>columns.</a:t>
             </a:r>
           </a:p>
           <a:p>
@@ -13713,16 +13840,11 @@
             </a:pPr>
             <a:r>
               <a:rPr lang="en-GB" sz="2000" dirty="0" smtClean="0"/>
-              <a:t>The data consists of 90,348 entries and 31 columns.</a:t>
-            </a:r>
-          </a:p>
-          <a:p>
-            <a:pPr marL="0" indent="0">
-              <a:buNone/>
-            </a:pPr>
+              <a:t>Data Types:</a:t>
+            </a:r>
             <a:r>
               <a:rPr lang="en-GB" sz="2000" dirty="0" smtClean="0"/>
-              <a:t>Column datatypes – 26 columns are of object datatype, 5 float datatype.</a:t>
+              <a:t> 26-object type, 5-float type columns.</a:t>
             </a:r>
             <a:endParaRPr lang="en-GB" sz="2000" dirty="0"/>
           </a:p>
@@ -13801,8 +13923,8 @@
         </p:blipFill>
         <p:spPr>
           <a:xfrm>
-            <a:off x="1155700" y="3405717"/>
-            <a:ext cx="8824913" cy="1811866"/>
+            <a:off x="1155700" y="2875086"/>
+            <a:ext cx="10511692" cy="2866292"/>
           </a:xfrm>
           <a:prstGeom prst="rect">
             <a:avLst/>
@@ -13904,7 +14026,15 @@
             </a:pPr>
             <a:r>
               <a:rPr lang="en-GB" sz="2000" dirty="0" smtClean="0"/>
-              <a:t>-Analysed the data to determine the aircraft with the lowest incident rates.</a:t>
+              <a:t>-</a:t>
+            </a:r>
+            <a:r>
+              <a:rPr lang="en-GB" sz="2000" dirty="0" smtClean="0"/>
+              <a:t>Analysed aircraft models to identify those with </a:t>
+            </a:r>
+            <a:r>
+              <a:rPr lang="en-GB" sz="2000" dirty="0" smtClean="0"/>
+              <a:t>the lowest incident rates.</a:t>
             </a:r>
           </a:p>
           <a:p>
@@ -13913,8 +14043,21 @@
             </a:pPr>
             <a:r>
               <a:rPr lang="en-GB" sz="2000" dirty="0" smtClean="0"/>
-              <a:t>-Analysed the total number of injuries to determine aircrafts with the lowest injury counts.</a:t>
-            </a:r>
+              <a:t>-Analysed </a:t>
+            </a:r>
+            <a:r>
+              <a:rPr lang="en-GB" sz="2000" dirty="0" smtClean="0"/>
+              <a:t>total </a:t>
+            </a:r>
+            <a:r>
+              <a:rPr lang="en-GB" sz="2000" dirty="0" smtClean="0"/>
+              <a:t>number of injuries to determine aircrafts with the lowest </a:t>
+            </a:r>
+            <a:r>
+              <a:rPr lang="en-GB" sz="2000" dirty="0" smtClean="0"/>
+              <a:t>injury rates.</a:t>
+            </a:r>
+            <a:endParaRPr lang="en-GB" sz="2000" dirty="0" smtClean="0"/>
           </a:p>
           <a:p>
             <a:pPr marL="0" indent="0">
@@ -13922,7 +14065,11 @@
             </a:pPr>
             <a:r>
               <a:rPr lang="en-GB" sz="2000" dirty="0" smtClean="0"/>
-              <a:t>-Checked on the impact weather condition had on fatality.</a:t>
+              <a:t>-Checked on the impact weather condition had </a:t>
+            </a:r>
+            <a:r>
+              <a:rPr lang="en-GB" sz="2000" dirty="0" smtClean="0"/>
+              <a:t>on accident severity.</a:t>
             </a:r>
             <a:endParaRPr lang="en-GB" sz="2000" dirty="0"/>
           </a:p>
@@ -13977,11 +14124,7 @@
           <a:p>
             <a:r>
               <a:rPr lang="en-GB" sz="2400" dirty="0" smtClean="0"/>
-              <a:t>Recommendation </a:t>
-            </a:r>
-            <a:r>
-              <a:rPr lang="en-GB" sz="2400" dirty="0" smtClean="0"/>
-              <a:t>1</a:t>
+              <a:t>Recommendation 1</a:t>
             </a:r>
             <a:br>
               <a:rPr lang="en-GB" sz="2400" dirty="0" smtClean="0"/>
@@ -14126,8 +14269,8 @@
               <a:t>, </a:t>
             </a:r>
             <a:r>
-              <a:rPr lang="en-GB" dirty="0"/>
-              <a:t>which show consistently </a:t>
+              <a:rPr lang="en-GB" dirty="0" smtClean="0"/>
+              <a:t>which consistently show </a:t>
             </a:r>
             <a:r>
               <a:rPr lang="en-GB" dirty="0" smtClean="0"/>

--- a/Aviation Accident Analysis and Recommendations.pptx
+++ b/Aviation Accident Analysis and Recommendations.pptx
@@ -13287,10 +13287,10 @@
           <a:lstStyle/>
           <a:p>
             <a:r>
-              <a:rPr lang="en-GB" sz="2400" dirty="0" smtClean="0"/>
+              <a:rPr lang="en-GB" sz="1800" dirty="0" smtClean="0"/>
               <a:t>Aviation Accident Analysis and Recommendations</a:t>
             </a:r>
-            <a:endParaRPr lang="en-GB" sz="2400" dirty="0"/>
+            <a:endParaRPr lang="en-GB" sz="1800" dirty="0"/>
           </a:p>
         </p:txBody>
       </p:sp>
@@ -13317,18 +13317,18 @@
           <a:lstStyle/>
           <a:p>
             <a:r>
-              <a:rPr lang="en-GB" sz="2000" dirty="0" smtClean="0"/>
+              <a:rPr lang="en-GB" dirty="0" smtClean="0"/>
               <a:t>Help the company identify low risk </a:t>
             </a:r>
             <a:r>
-              <a:rPr lang="en-GB" sz="2000" dirty="0" smtClean="0"/>
+              <a:rPr lang="en-GB" dirty="0" smtClean="0"/>
               <a:t>aircraft MODELS that </a:t>
             </a:r>
             <a:r>
-              <a:rPr lang="en-GB" sz="2000" dirty="0" smtClean="0"/>
+              <a:rPr lang="en-GB" dirty="0" smtClean="0"/>
               <a:t>they can use to enter the aviation industry</a:t>
             </a:r>
-            <a:endParaRPr lang="en-GB" sz="2000" dirty="0"/>
+            <a:endParaRPr lang="en-GB" dirty="0"/>
           </a:p>
         </p:txBody>
       </p:sp>
@@ -13378,17 +13378,17 @@
           <a:lstStyle/>
           <a:p>
             <a:r>
-              <a:rPr lang="en-GB" sz="2400" dirty="0" smtClean="0"/>
+              <a:rPr lang="en-GB" sz="1800" dirty="0" smtClean="0"/>
               <a:t>Recommendation 3</a:t>
             </a:r>
             <a:br>
-              <a:rPr lang="en-GB" sz="2400" dirty="0" smtClean="0"/>
+              <a:rPr lang="en-GB" sz="1800" dirty="0" smtClean="0"/>
             </a:br>
             <a:r>
-              <a:rPr lang="en-GB" sz="2400" dirty="0" smtClean="0"/>
+              <a:rPr lang="en-GB" sz="1800" dirty="0" smtClean="0"/>
               <a:t>Aircraft operations in different weather conditions</a:t>
             </a:r>
-            <a:endParaRPr lang="en-GB" sz="2400" dirty="0"/>
+            <a:endParaRPr lang="en-GB" sz="1800" dirty="0"/>
           </a:p>
         </p:txBody>
       </p:sp>
@@ -13477,10 +13477,10 @@
           <a:lstStyle/>
           <a:p>
             <a:r>
-              <a:rPr lang="en-GB" sz="2400" dirty="0" smtClean="0"/>
+              <a:rPr lang="en-GB" sz="1800" dirty="0" smtClean="0"/>
               <a:t>Q&amp;A Session</a:t>
             </a:r>
-            <a:endParaRPr lang="en-GB" sz="2400" dirty="0"/>
+            <a:endParaRPr lang="en-GB" sz="1800" dirty="0"/>
           </a:p>
         </p:txBody>
       </p:sp>
@@ -13507,73 +13507,73 @@
           <a:lstStyle/>
           <a:p>
             <a:r>
-              <a:rPr lang="en-GB" dirty="0" smtClean="0"/>
+              <a:rPr lang="en-GB" sz="1900" dirty="0" smtClean="0"/>
               <a:t>Are there any </a:t>
             </a:r>
             <a:r>
-              <a:rPr lang="en-GB" dirty="0"/>
+              <a:rPr lang="en-GB" sz="1900" dirty="0"/>
               <a:t>q</a:t>
             </a:r>
             <a:r>
-              <a:rPr lang="en-GB" dirty="0" smtClean="0"/>
+              <a:rPr lang="en-GB" sz="1900" dirty="0" smtClean="0"/>
               <a:t>uestions?</a:t>
             </a:r>
-            <a:endParaRPr lang="en-GB" dirty="0"/>
-          </a:p>
-          <a:p>
-            <a:endParaRPr lang="en-GB" dirty="0" smtClean="0"/>
-          </a:p>
-          <a:p>
-            <a:r>
-              <a:rPr lang="en-GB" dirty="0" smtClean="0"/>
+            <a:endParaRPr lang="en-GB" sz="1900" dirty="0"/>
+          </a:p>
+          <a:p>
+            <a:endParaRPr lang="en-GB" sz="1900" dirty="0" smtClean="0"/>
+          </a:p>
+          <a:p>
+            <a:r>
+              <a:rPr lang="en-GB" sz="1900" dirty="0" smtClean="0"/>
               <a:t>Contact Information:</a:t>
             </a:r>
           </a:p>
           <a:p>
             <a:r>
-              <a:rPr lang="en-GB" dirty="0" smtClean="0"/>
+              <a:rPr lang="en-GB" sz="1900" dirty="0" smtClean="0"/>
               <a:t>Name: Jenipher Oduor</a:t>
             </a:r>
           </a:p>
           <a:p>
             <a:r>
-              <a:rPr lang="en-GB" dirty="0" smtClean="0"/>
+              <a:rPr lang="en-GB" sz="1900" dirty="0" smtClean="0"/>
               <a:t>Email: </a:t>
             </a:r>
             <a:r>
-              <a:rPr lang="en-GB" dirty="0" smtClean="0">
+              <a:rPr lang="en-GB" sz="1900" dirty="0" smtClean="0">
                 <a:hlinkClick r:id="rId2"/>
               </a:rPr>
               <a:t>jenipheroduor@gmail.com</a:t>
             </a:r>
-            <a:endParaRPr lang="en-GB" dirty="0" smtClean="0"/>
-          </a:p>
-          <a:p>
-            <a:r>
-              <a:rPr lang="en-GB" dirty="0" smtClean="0"/>
+            <a:endParaRPr lang="en-GB" sz="1900" dirty="0" smtClean="0"/>
+          </a:p>
+          <a:p>
+            <a:r>
+              <a:rPr lang="en-GB" sz="1900" dirty="0" smtClean="0"/>
               <a:t>LinkedIn</a:t>
             </a:r>
             <a:r>
-              <a:rPr lang="en-GB" dirty="0"/>
+              <a:rPr lang="en-GB" sz="1900" dirty="0"/>
               <a:t>: </a:t>
             </a:r>
             <a:r>
-              <a:rPr lang="en-GB" dirty="0" smtClean="0">
+              <a:rPr lang="en-GB" sz="1900" dirty="0" smtClean="0">
                 <a:hlinkClick r:id="rId3"/>
               </a:rPr>
               <a:t>www.linkedin.com/in/jenipher-oduor</a:t>
             </a:r>
-            <a:endParaRPr lang="en-GB" dirty="0" smtClean="0"/>
-          </a:p>
-          <a:p>
-            <a:endParaRPr lang="en-GB" dirty="0"/>
-          </a:p>
-          <a:p>
-            <a:r>
-              <a:rPr lang="en-GB" dirty="0" smtClean="0"/>
+            <a:endParaRPr lang="en-GB" sz="1900" dirty="0" smtClean="0"/>
+          </a:p>
+          <a:p>
+            <a:endParaRPr lang="en-GB" sz="1900" dirty="0"/>
+          </a:p>
+          <a:p>
+            <a:r>
+              <a:rPr lang="en-GB" sz="1900" dirty="0" smtClean="0"/>
               <a:t>Thankyou.</a:t>
             </a:r>
-            <a:endParaRPr lang="en-GB" dirty="0"/>
+            <a:endParaRPr lang="en-GB" sz="1900" dirty="0"/>
           </a:p>
           <a:p>
             <a:endParaRPr lang="en-GB" dirty="0" smtClean="0"/>
@@ -13631,10 +13631,10 @@
           <a:lstStyle/>
           <a:p>
             <a:r>
-              <a:rPr lang="en-GB" sz="2400" dirty="0" smtClean="0"/>
+              <a:rPr lang="en-GB" sz="1800" dirty="0" smtClean="0"/>
               <a:t>Goal</a:t>
             </a:r>
-            <a:endParaRPr lang="en-GB" sz="2400" dirty="0"/>
+            <a:endParaRPr lang="en-GB" sz="1800" dirty="0"/>
           </a:p>
         </p:txBody>
       </p:sp>
@@ -13656,22 +13656,22 @@
           <a:lstStyle/>
           <a:p>
             <a:r>
-              <a:rPr lang="en-GB" sz="2000" dirty="0" smtClean="0"/>
+              <a:rPr lang="en-GB" dirty="0" smtClean="0"/>
               <a:t>Assist the company to identify which low risk aircraft they can purchase as </a:t>
             </a:r>
             <a:r>
-              <a:rPr lang="en-GB" sz="2000" dirty="0" smtClean="0"/>
+              <a:rPr lang="en-GB" dirty="0" smtClean="0"/>
               <a:t>they expand into </a:t>
             </a:r>
             <a:r>
-              <a:rPr lang="en-GB" sz="2000" dirty="0" smtClean="0"/>
+              <a:rPr lang="en-GB" dirty="0" smtClean="0"/>
               <a:t>the aviation </a:t>
             </a:r>
             <a:r>
-              <a:rPr lang="en-GB" sz="2000" dirty="0" smtClean="0"/>
+              <a:rPr lang="en-GB" dirty="0" smtClean="0"/>
               <a:t>industry.</a:t>
             </a:r>
-            <a:endParaRPr lang="en-GB" sz="2000" dirty="0"/>
+            <a:endParaRPr lang="en-GB" dirty="0"/>
           </a:p>
         </p:txBody>
       </p:sp>
@@ -13723,10 +13723,10 @@
           <a:lstStyle/>
           <a:p>
             <a:r>
-              <a:rPr lang="en-GB" sz="2400" dirty="0" smtClean="0"/>
+              <a:rPr lang="en-GB" sz="1800" dirty="0" smtClean="0"/>
               <a:t>Data Overview</a:t>
             </a:r>
-            <a:endParaRPr lang="en-GB" sz="2400" dirty="0"/>
+            <a:endParaRPr lang="en-GB" sz="1800" dirty="0"/>
           </a:p>
         </p:txBody>
       </p:sp>
@@ -13751,7 +13751,7 @@
               <a:buNone/>
             </a:pPr>
             <a:r>
-              <a:rPr lang="en-GB" sz="2000" dirty="0" smtClean="0"/>
+              <a:rPr lang="en-GB" dirty="0" smtClean="0"/>
               <a:t>Dataset Source:</a:t>
             </a:r>
           </a:p>
@@ -13760,27 +13760,27 @@
               <a:buNone/>
             </a:pPr>
             <a:r>
-              <a:rPr lang="en-GB" sz="2000" dirty="0" smtClean="0"/>
+              <a:rPr lang="en-GB" dirty="0" smtClean="0"/>
               <a:t>National Transportation Safety </a:t>
             </a:r>
             <a:r>
-              <a:rPr lang="en-GB" sz="2000" dirty="0" smtClean="0"/>
+              <a:rPr lang="en-GB" dirty="0" smtClean="0"/>
               <a:t>Board (NTSB)</a:t>
             </a:r>
-            <a:endParaRPr lang="en-GB" sz="2000" dirty="0" smtClean="0"/>
+            <a:endParaRPr lang="en-GB" dirty="0" smtClean="0"/>
           </a:p>
           <a:p>
             <a:pPr marL="0" indent="0">
               <a:buNone/>
             </a:pPr>
-            <a:endParaRPr lang="en-GB" sz="2000" dirty="0"/>
+            <a:endParaRPr lang="en-GB" dirty="0"/>
           </a:p>
           <a:p>
             <a:pPr marL="0" indent="0">
               <a:buNone/>
             </a:pPr>
             <a:r>
-              <a:rPr lang="en-GB" sz="2000" dirty="0" smtClean="0"/>
+              <a:rPr lang="en-GB" dirty="0" smtClean="0"/>
               <a:t>About the Data:</a:t>
             </a:r>
           </a:p>
@@ -13789,23 +13789,23 @@
               <a:buNone/>
             </a:pPr>
             <a:r>
-              <a:rPr lang="en-GB" sz="2000" dirty="0" smtClean="0"/>
+              <a:rPr lang="en-GB" dirty="0" smtClean="0"/>
               <a:t>The </a:t>
             </a:r>
             <a:r>
-              <a:rPr lang="en-GB" sz="2000" dirty="0" smtClean="0"/>
+              <a:rPr lang="en-GB" dirty="0" smtClean="0"/>
               <a:t>dataset </a:t>
             </a:r>
             <a:r>
-              <a:rPr lang="en-GB" sz="2000" dirty="0" smtClean="0"/>
+              <a:rPr lang="en-GB" dirty="0" smtClean="0"/>
               <a:t>includes aviation accidents and selected incidents from 1962 to </a:t>
             </a:r>
             <a:r>
-              <a:rPr lang="en-GB" sz="2000" dirty="0" smtClean="0"/>
+              <a:rPr lang="en-GB" dirty="0" smtClean="0"/>
               <a:t>2023, covering the </a:t>
             </a:r>
             <a:r>
-              <a:rPr lang="en-GB" sz="2000" dirty="0" smtClean="0"/>
+              <a:rPr lang="en-GB" dirty="0" smtClean="0"/>
               <a:t>United States and International waters.</a:t>
             </a:r>
           </a:p>
@@ -13814,23 +13814,23 @@
               <a:buNone/>
             </a:pPr>
             <a:r>
-              <a:rPr lang="en-GB" sz="2000" dirty="0" smtClean="0"/>
+              <a:rPr lang="en-GB" dirty="0" smtClean="0"/>
               <a:t>Size:</a:t>
             </a:r>
             <a:r>
-              <a:rPr lang="en-GB" sz="2000" dirty="0" smtClean="0"/>
+              <a:rPr lang="en-GB" dirty="0" smtClean="0"/>
               <a:t> </a:t>
             </a:r>
             <a:r>
-              <a:rPr lang="en-GB" sz="2000" dirty="0" smtClean="0"/>
+              <a:rPr lang="en-GB" dirty="0" smtClean="0"/>
               <a:t>90,348 </a:t>
             </a:r>
             <a:r>
-              <a:rPr lang="en-GB" sz="2000" dirty="0" smtClean="0"/>
+              <a:rPr lang="en-GB" dirty="0" smtClean="0"/>
               <a:t>entries, 31 </a:t>
             </a:r>
             <a:r>
-              <a:rPr lang="en-GB" sz="2000" dirty="0" smtClean="0"/>
+              <a:rPr lang="en-GB" dirty="0" smtClean="0"/>
               <a:t>columns.</a:t>
             </a:r>
           </a:p>
@@ -13839,14 +13839,14 @@
               <a:buNone/>
             </a:pPr>
             <a:r>
-              <a:rPr lang="en-GB" sz="2000" dirty="0" smtClean="0"/>
+              <a:rPr lang="en-GB" dirty="0" smtClean="0"/>
               <a:t>Data Types:</a:t>
             </a:r>
             <a:r>
-              <a:rPr lang="en-GB" sz="2000" dirty="0" smtClean="0"/>
+              <a:rPr lang="en-GB" dirty="0" smtClean="0"/>
               <a:t> 26-object type, 5-float type columns.</a:t>
             </a:r>
-            <a:endParaRPr lang="en-GB" sz="2000" dirty="0"/>
+            <a:endParaRPr lang="en-GB" dirty="0"/>
           </a:p>
         </p:txBody>
       </p:sp>
@@ -13898,10 +13898,10 @@
           <a:lstStyle/>
           <a:p>
             <a:r>
-              <a:rPr lang="en-GB" sz="2400" dirty="0" smtClean="0"/>
+              <a:rPr lang="en-GB" sz="1800" dirty="0" smtClean="0"/>
               <a:t>Sample of the dataset</a:t>
             </a:r>
-            <a:endParaRPr lang="en-GB" sz="2400" dirty="0"/>
+            <a:endParaRPr lang="en-GB" sz="1800" dirty="0"/>
           </a:p>
         </p:txBody>
       </p:sp>
@@ -13979,10 +13979,10 @@
           <a:lstStyle/>
           <a:p>
             <a:r>
-              <a:rPr lang="en-GB" sz="2400" dirty="0" smtClean="0"/>
+              <a:rPr lang="en-GB" sz="1800" dirty="0" smtClean="0"/>
               <a:t>Data Preparation</a:t>
             </a:r>
-            <a:endParaRPr lang="en-GB" sz="2400" dirty="0"/>
+            <a:endParaRPr lang="en-GB" sz="1800" dirty="0"/>
           </a:p>
         </p:txBody>
       </p:sp>
@@ -14007,7 +14007,7 @@
               <a:buNone/>
             </a:pPr>
             <a:r>
-              <a:rPr lang="en-GB" sz="2000" dirty="0" smtClean="0"/>
+              <a:rPr lang="en-GB" dirty="0" smtClean="0"/>
               <a:t>Steps taken</a:t>
             </a:r>
           </a:p>
@@ -14016,7 +14016,7 @@
               <a:buNone/>
             </a:pPr>
             <a:r>
-              <a:rPr lang="en-GB" sz="2000" dirty="0" smtClean="0"/>
+              <a:rPr lang="en-GB" dirty="0" smtClean="0"/>
               <a:t>-Cleaning the data to deal with missing values.</a:t>
             </a:r>
           </a:p>
@@ -14025,15 +14025,15 @@
               <a:buNone/>
             </a:pPr>
             <a:r>
-              <a:rPr lang="en-GB" sz="2000" dirty="0" smtClean="0"/>
+              <a:rPr lang="en-GB" dirty="0" smtClean="0"/>
               <a:t>-</a:t>
             </a:r>
             <a:r>
-              <a:rPr lang="en-GB" sz="2000" dirty="0" smtClean="0"/>
+              <a:rPr lang="en-GB" dirty="0" smtClean="0"/>
               <a:t>Analysed aircraft models to identify those with </a:t>
             </a:r>
             <a:r>
-              <a:rPr lang="en-GB" sz="2000" dirty="0" smtClean="0"/>
+              <a:rPr lang="en-GB" dirty="0" smtClean="0"/>
               <a:t>the lowest incident rates.</a:t>
             </a:r>
           </a:p>
@@ -14042,36 +14042,36 @@
               <a:buNone/>
             </a:pPr>
             <a:r>
-              <a:rPr lang="en-GB" sz="2000" dirty="0" smtClean="0"/>
+              <a:rPr lang="en-GB" dirty="0" smtClean="0"/>
               <a:t>-Analysed </a:t>
             </a:r>
             <a:r>
-              <a:rPr lang="en-GB" sz="2000" dirty="0" smtClean="0"/>
+              <a:rPr lang="en-GB" dirty="0" smtClean="0"/>
               <a:t>total </a:t>
             </a:r>
             <a:r>
-              <a:rPr lang="en-GB" sz="2000" dirty="0" smtClean="0"/>
+              <a:rPr lang="en-GB" dirty="0" smtClean="0"/>
               <a:t>number of injuries to determine aircrafts with the lowest </a:t>
             </a:r>
             <a:r>
-              <a:rPr lang="en-GB" sz="2000" dirty="0" smtClean="0"/>
+              <a:rPr lang="en-GB" dirty="0" smtClean="0"/>
               <a:t>injury rates.</a:t>
             </a:r>
-            <a:endParaRPr lang="en-GB" sz="2000" dirty="0" smtClean="0"/>
+            <a:endParaRPr lang="en-GB" dirty="0" smtClean="0"/>
           </a:p>
           <a:p>
             <a:pPr marL="0" indent="0">
               <a:buNone/>
             </a:pPr>
             <a:r>
-              <a:rPr lang="en-GB" sz="2000" dirty="0" smtClean="0"/>
+              <a:rPr lang="en-GB" dirty="0" smtClean="0"/>
               <a:t>-Checked on the impact weather condition had </a:t>
             </a:r>
             <a:r>
-              <a:rPr lang="en-GB" sz="2000" dirty="0" smtClean="0"/>
+              <a:rPr lang="en-GB" dirty="0" smtClean="0"/>
               <a:t>on accident severity.</a:t>
             </a:r>
-            <a:endParaRPr lang="en-GB" sz="2000" dirty="0"/>
+            <a:endParaRPr lang="en-GB" dirty="0"/>
           </a:p>
         </p:txBody>
       </p:sp>
@@ -14123,17 +14123,17 @@
           <a:lstStyle/>
           <a:p>
             <a:r>
-              <a:rPr lang="en-GB" sz="2400" dirty="0" smtClean="0"/>
+              <a:rPr lang="en-GB" sz="1800" dirty="0" smtClean="0"/>
               <a:t>Recommendation 1</a:t>
             </a:r>
             <a:br>
-              <a:rPr lang="en-GB" sz="2400" dirty="0" smtClean="0"/>
+              <a:rPr lang="en-GB" sz="1800" dirty="0" smtClean="0"/>
             </a:br>
             <a:r>
-              <a:rPr lang="en-GB" sz="2400" dirty="0" smtClean="0"/>
+              <a:rPr lang="en-GB" sz="1800" dirty="0" smtClean="0"/>
               <a:t>Aircraft models with the lowest accident count</a:t>
             </a:r>
-            <a:endParaRPr lang="en-GB" sz="2400" dirty="0"/>
+            <a:endParaRPr lang="en-GB" sz="1800" dirty="0"/>
           </a:p>
         </p:txBody>
       </p:sp>
@@ -14226,10 +14226,10 @@
           <a:lstStyle/>
           <a:p>
             <a:r>
-              <a:rPr lang="en-GB" sz="2400" dirty="0" smtClean="0"/>
+              <a:rPr lang="en-GB" sz="1800" dirty="0" smtClean="0"/>
               <a:t>Recommendation 1</a:t>
             </a:r>
-            <a:endParaRPr lang="en-GB" sz="2400" dirty="0"/>
+            <a:endParaRPr lang="en-GB" sz="1800" dirty="0"/>
           </a:p>
         </p:txBody>
       </p:sp>
@@ -14326,14 +14326,14 @@
           <a:lstStyle/>
           <a:p>
             <a:r>
-              <a:rPr lang="en-GB" sz="2400" dirty="0" smtClean="0"/>
+              <a:rPr lang="en-GB" sz="1800" dirty="0" smtClean="0"/>
               <a:t>Recommendation 2</a:t>
             </a:r>
             <a:br>
-              <a:rPr lang="en-GB" sz="2400" dirty="0" smtClean="0"/>
+              <a:rPr lang="en-GB" sz="1800" dirty="0" smtClean="0"/>
             </a:br>
             <a:r>
-              <a:rPr lang="en-GB" sz="2400" dirty="0"/>
+              <a:rPr lang="en-GB" sz="1800" dirty="0"/>
               <a:t>Aircraft model with lowest injuries per accident</a:t>
             </a:r>
           </a:p>
@@ -14428,17 +14428,17 @@
           <a:lstStyle/>
           <a:p>
             <a:r>
-              <a:rPr lang="en-GB" sz="2400" dirty="0" smtClean="0"/>
+              <a:rPr lang="en-GB" sz="1800" dirty="0" smtClean="0"/>
               <a:t>Recommendation 2</a:t>
             </a:r>
             <a:br>
-              <a:rPr lang="en-GB" sz="2400" dirty="0" smtClean="0"/>
+              <a:rPr lang="en-GB" sz="1800" dirty="0" smtClean="0"/>
             </a:br>
             <a:r>
-              <a:rPr lang="en-GB" sz="2400" dirty="0" smtClean="0"/>
+              <a:rPr lang="en-GB" sz="1800" dirty="0" smtClean="0"/>
               <a:t>Aircraft model with lowest injuries per accident</a:t>
             </a:r>
-            <a:endParaRPr lang="en-GB" sz="2400" dirty="0"/>
+            <a:endParaRPr lang="en-GB" sz="1800" dirty="0"/>
           </a:p>
         </p:txBody>
       </p:sp>
@@ -14459,11 +14459,31 @@
           <a:p>
             <a:r>
               <a:rPr lang="en-GB" dirty="0" smtClean="0"/>
-              <a:t>Aircrafts like FANTASY AIR SRO and Cessna have </a:t>
+              <a:t>SRO </a:t>
+            </a:r>
+            <a:r>
+              <a:rPr lang="en-GB" dirty="0" smtClean="0"/>
+              <a:t>and Cessna have </a:t>
+            </a:r>
+            <a:r>
+              <a:rPr lang="en-GB" dirty="0" err="1"/>
+              <a:t>lowAircrafts</a:t>
             </a:r>
             <a:r>
               <a:rPr lang="en-GB" dirty="0"/>
-              <a:t>lower injury rates even when accidents </a:t>
+              <a:t> like FANTASY AIR </a:t>
+            </a:r>
+            <a:r>
+              <a:rPr lang="en-GB" dirty="0" err="1"/>
+              <a:t>er</a:t>
+            </a:r>
+            <a:r>
+              <a:rPr lang="en-GB" dirty="0"/>
+              <a:t> </a:t>
+            </a:r>
+            <a:r>
+              <a:rPr lang="en-GB" dirty="0"/>
+              <a:t>injury rates even when accidents </a:t>
             </a:r>
             <a:r>
               <a:rPr lang="en-GB" dirty="0" smtClean="0"/>
